--- a/content/youtube/shorts/SHORT_VID-005_ai_zokuningei.pptx
+++ b/content/youtube/shorts/SHORT_VID-005_ai_zokuningei.pptx
@@ -2333,49 +2333,52 @@
                 <a:ea typeface="Hiragino Sans" pitchFamily="34" charset="-122"/>
                 <a:cs typeface="Hiragino Sans" pitchFamily="34" charset="-120"/>
               </a:rPr>
-              <a:t>詳しくはnoteで</a:t>
+              <a:t>仕組みで動かせ。</a:t>
             </a:r>
             <a:endParaRPr lang="en-US" sz="2000" dirty="0"/>
           </a:p>
-        </p:txBody>
-      </p:sp>
-      <p:sp>
-        <p:nvSpPr>
-          <p:cNvPr id="3" name="Text 1"/>
-          <p:cNvSpPr/>
-          <p:nvPr/>
-        </p:nvSpPr>
-        <p:spPr>
-          <a:xfrm>
-            <a:off x="274320" y="4114800"/>
-            <a:ext cx="3566160" cy="914400"/>
-          </a:xfrm>
-          <a:prstGeom prst="rect">
-            <a:avLst/>
-          </a:prstGeom>
-          <a:noFill/>
-          <a:ln/>
-        </p:spPr>
-        <p:txBody>
-          <a:bodyPr wrap="square" rtlCol="0" anchor="t"/>
-          <a:lstStyle/>
           <a:p>
             <a:pPr algn="l" indent="0" marL="0">
+              <a:lnSpc>
+                <a:spcPct val="130000"/>
+              </a:lnSpc>
               <a:buNone/>
             </a:pPr>
             <a:r>
-              <a:rPr lang="en-US" sz="1200" dirty="0">
+              <a:rPr lang="en-US" sz="2000" b="1" dirty="0">
                 <a:solidFill>
-                  <a:srgbClr val="57534E"/>
+                  <a:srgbClr val="FFFFFF"/>
                 </a:solidFill>
                 <a:latin typeface="Hiragino Sans" pitchFamily="34" charset="0"/>
                 <a:ea typeface="Hiragino Sans" pitchFamily="34" charset="-122"/>
                 <a:cs typeface="Hiragino Sans" pitchFamily="34" charset="-120"/>
               </a:rPr>
-              <a:t>この動画はPowerPointからInsight Training Studioで自動生成しています</a:t>
-            </a:r>
-            <a:endParaRPr lang="en-US" sz="1200" dirty="0"/>
-          </a:p>
+              <a:t>属人芸で終わるな。</a:t>
+            </a:r>
+            <a:endParaRPr lang="en-US" sz="2000" dirty="0"/>
+          </a:p>
+        </p:txBody>
+      </p:sp>
+      <p:sp>
+        <p:nvSpPr>
+          <p:cNvPr id="3" name="Text 1"/>
+          <p:cNvSpPr/>
+          <p:nvPr/>
+        </p:nvSpPr>
+        <p:spPr>
+          <a:xfrm>
+            <a:off x="274320" y="4114800"/>
+            <a:ext cx="3566160" cy="914400"/>
+          </a:xfrm>
+          <a:prstGeom prst="rect">
+            <a:avLst/>
+          </a:prstGeom>
+          <a:noFill/>
+          <a:ln/>
+        </p:spPr>
+        <p:txBody>
+          <a:bodyPr wrap="square" rtlCol="0" anchor="t"/>
+          <a:lstStyle/>
           <a:p>
             <a:pPr algn="l" indent="0" marL="0">
               <a:buNone/>
